--- a/Figure 5/Figure 5.pptx
+++ b/Figure 5/Figure 5.pptx
@@ -7,7 +7,7 @@
   <p:sldIdLst>
     <p:sldId id="256" r:id="rId3"/>
   </p:sldIdLst>
-  <p:sldSz cx="3599815" cy="3959860"/>
+  <p:sldSz cx="3599815" cy="5759450"/>
   <p:notesSz cx="6858000" cy="9144000"/>
   <p:custDataLst>
     <p:tags r:id="rId7"/>
@@ -139,8 +139,8 @@
         </p:nvSpPr>
         <p:spPr>
           <a:xfrm>
-            <a:off x="451149" y="649490"/>
-            <a:ext cx="2706884" cy="1381659"/>
+            <a:off x="451334" y="945223"/>
+            <a:ext cx="2707997" cy="2010772"/>
           </a:xfrm>
         </p:spPr>
         <p:txBody>
@@ -171,8 +171,8 @@
         </p:nvSpPr>
         <p:spPr>
           <a:xfrm>
-            <a:off x="451149" y="2084430"/>
-            <a:ext cx="2706884" cy="958157"/>
+            <a:off x="451334" y="3033537"/>
+            <a:ext cx="2707997" cy="1394436"/>
           </a:xfrm>
         </p:spPr>
         <p:txBody>
@@ -491,8 +491,8 @@
         </p:nvSpPr>
         <p:spPr>
           <a:xfrm>
-            <a:off x="2582818" y="211289"/>
-            <a:ext cx="778228" cy="3363200"/>
+            <a:off x="2583881" y="307494"/>
+            <a:ext cx="778548" cy="4894571"/>
           </a:xfrm>
         </p:spPr>
         <p:txBody>
@@ -519,8 +519,8 @@
         </p:nvSpPr>
         <p:spPr>
           <a:xfrm>
-            <a:off x="248131" y="211289"/>
-            <a:ext cx="2289572" cy="3363200"/>
+            <a:off x="248234" y="307494"/>
+            <a:ext cx="2290515" cy="4894571"/>
           </a:xfrm>
         </p:spPr>
         <p:txBody>
@@ -835,8 +835,8 @@
         </p:nvSpPr>
         <p:spPr>
           <a:xfrm>
-            <a:off x="246250" y="989392"/>
-            <a:ext cx="3112917" cy="1650824"/>
+            <a:off x="246352" y="1439894"/>
+            <a:ext cx="3114197" cy="2402498"/>
           </a:xfrm>
         </p:spPr>
         <p:txBody>
@@ -867,8 +867,8 @@
         </p:nvSpPr>
         <p:spPr>
           <a:xfrm>
-            <a:off x="246250" y="2655833"/>
-            <a:ext cx="3112917" cy="868128"/>
+            <a:off x="246352" y="3865119"/>
+            <a:ext cx="3114197" cy="1263414"/>
           </a:xfrm>
         </p:spPr>
         <p:txBody>
@@ -1098,8 +1098,8 @@
         </p:nvSpPr>
         <p:spPr>
           <a:xfrm>
-            <a:off x="248131" y="1056454"/>
-            <a:ext cx="1533902" cy="2518035"/>
+            <a:off x="248234" y="1537491"/>
+            <a:ext cx="1534534" cy="3664578"/>
           </a:xfrm>
         </p:spPr>
         <p:txBody>
@@ -1159,8 +1159,8 @@
         </p:nvSpPr>
         <p:spPr>
           <a:xfrm>
-            <a:off x="1827146" y="1056454"/>
-            <a:ext cx="1533902" cy="2518035"/>
+            <a:off x="1827898" y="1537491"/>
+            <a:ext cx="1534534" cy="3664578"/>
           </a:xfrm>
         </p:spPr>
         <p:txBody>
@@ -1308,8 +1308,8 @@
         </p:nvSpPr>
         <p:spPr>
           <a:xfrm>
-            <a:off x="248602" y="211289"/>
-            <a:ext cx="3112917" cy="767078"/>
+            <a:off x="248705" y="307494"/>
+            <a:ext cx="3114197" cy="1116352"/>
           </a:xfrm>
         </p:spPr>
         <p:txBody>
@@ -1336,8 +1336,8 @@
         </p:nvSpPr>
         <p:spPr>
           <a:xfrm>
-            <a:off x="248602" y="972856"/>
-            <a:ext cx="1526851" cy="476782"/>
+            <a:off x="248705" y="1415830"/>
+            <a:ext cx="1527481" cy="693876"/>
           </a:xfrm>
         </p:spPr>
         <p:txBody>
@@ -1402,8 +1402,8 @@
         </p:nvSpPr>
         <p:spPr>
           <a:xfrm>
-            <a:off x="248602" y="1449638"/>
-            <a:ext cx="1526851" cy="2132202"/>
+            <a:off x="248705" y="2109704"/>
+            <a:ext cx="1527481" cy="3103061"/>
           </a:xfrm>
         </p:spPr>
         <p:txBody>
@@ -1463,8 +1463,8 @@
         </p:nvSpPr>
         <p:spPr>
           <a:xfrm>
-            <a:off x="1827146" y="972856"/>
-            <a:ext cx="1534370" cy="476782"/>
+            <a:off x="1827898" y="1415830"/>
+            <a:ext cx="1535002" cy="693876"/>
           </a:xfrm>
         </p:spPr>
         <p:txBody>
@@ -1529,8 +1529,8 @@
         </p:nvSpPr>
         <p:spPr>
           <a:xfrm>
-            <a:off x="1827146" y="1449638"/>
-            <a:ext cx="1534370" cy="2132202"/>
+            <a:off x="1827898" y="2109704"/>
+            <a:ext cx="1535002" cy="3103061"/>
           </a:xfrm>
         </p:spPr>
         <p:txBody>
@@ -1877,8 +1877,8 @@
         </p:nvSpPr>
         <p:spPr>
           <a:xfrm>
-            <a:off x="248602" y="264574"/>
-            <a:ext cx="1164054" cy="926004"/>
+            <a:off x="248705" y="385042"/>
+            <a:ext cx="1164534" cy="1347643"/>
           </a:xfrm>
         </p:spPr>
         <p:txBody>
@@ -1909,8 +1909,8 @@
         </p:nvSpPr>
         <p:spPr>
           <a:xfrm>
-            <a:off x="1534370" y="571404"/>
-            <a:ext cx="1827146" cy="2820273"/>
+            <a:off x="1535002" y="831584"/>
+            <a:ext cx="1827898" cy="4104433"/>
           </a:xfrm>
         </p:spPr>
         <p:txBody>
@@ -1998,8 +1998,8 @@
         </p:nvSpPr>
         <p:spPr>
           <a:xfrm>
-            <a:off x="248602" y="1190577"/>
-            <a:ext cx="1164054" cy="2205694"/>
+            <a:off x="248705" y="1732684"/>
+            <a:ext cx="1164534" cy="3210016"/>
           </a:xfrm>
         </p:spPr>
         <p:txBody>
@@ -2152,8 +2152,8 @@
         </p:nvSpPr>
         <p:spPr>
           <a:xfrm>
-            <a:off x="248602" y="264574"/>
-            <a:ext cx="1164054" cy="926004"/>
+            <a:off x="248705" y="385042"/>
+            <a:ext cx="1164534" cy="1347643"/>
           </a:xfrm>
         </p:spPr>
         <p:txBody>
@@ -2184,8 +2184,8 @@
         </p:nvSpPr>
         <p:spPr>
           <a:xfrm>
-            <a:off x="1534370" y="571404"/>
-            <a:ext cx="1827146" cy="2820273"/>
+            <a:off x="1535002" y="831584"/>
+            <a:ext cx="1827898" cy="4104433"/>
           </a:xfrm>
         </p:spPr>
         <p:txBody>
@@ -2245,8 +2245,8 @@
         </p:nvSpPr>
         <p:spPr>
           <a:xfrm>
-            <a:off x="248602" y="1190577"/>
-            <a:ext cx="1164054" cy="2205694"/>
+            <a:off x="248705" y="1732684"/>
+            <a:ext cx="1164534" cy="3210016"/>
           </a:xfrm>
         </p:spPr>
         <p:txBody>
@@ -2404,8 +2404,8 @@
         </p:nvSpPr>
         <p:spPr>
           <a:xfrm>
-            <a:off x="248131" y="211289"/>
-            <a:ext cx="3112917" cy="767078"/>
+            <a:off x="248234" y="307494"/>
+            <a:ext cx="3114197" cy="1116352"/>
           </a:xfrm>
           <a:prstGeom prst="rect">
             <a:avLst/>
@@ -2437,8 +2437,8 @@
         </p:nvSpPr>
         <p:spPr>
           <a:xfrm>
-            <a:off x="248131" y="1056454"/>
-            <a:ext cx="3112917" cy="2518035"/>
+            <a:off x="248234" y="1537491"/>
+            <a:ext cx="3114197" cy="3664578"/>
           </a:xfrm>
           <a:prstGeom prst="rect">
             <a:avLst/>
@@ -2503,8 +2503,8 @@
         </p:nvSpPr>
         <p:spPr>
           <a:xfrm>
-            <a:off x="248131" y="3678297"/>
-            <a:ext cx="812064" cy="211289"/>
+            <a:off x="248234" y="5353142"/>
+            <a:ext cx="812399" cy="307494"/>
           </a:xfrm>
           <a:prstGeom prst="rect">
             <a:avLst/>
@@ -2543,8 +2543,8 @@
         </p:nvSpPr>
         <p:spPr>
           <a:xfrm>
-            <a:off x="1195540" y="3678297"/>
-            <a:ext cx="1218098" cy="211289"/>
+            <a:off x="1196030" y="5353142"/>
+            <a:ext cx="1218600" cy="307494"/>
           </a:xfrm>
           <a:prstGeom prst="rect">
             <a:avLst/>
@@ -2580,8 +2580,8 @@
         </p:nvSpPr>
         <p:spPr>
           <a:xfrm>
-            <a:off x="2548984" y="3678297"/>
-            <a:ext cx="812064" cy="211289"/>
+            <a:off x="2550032" y="5353142"/>
+            <a:ext cx="812399" cy="307494"/>
           </a:xfrm>
           <a:prstGeom prst="rect">
             <a:avLst/>
@@ -2919,7 +2919,7 @@
       <p:grpSpPr/>
       <p:pic>
         <p:nvPicPr>
-          <p:cNvPr id="8" name="图片 7" descr="Figure 5(b)"/>
+          <p:cNvPr id="3" name="图片 2" descr="Figure 6(b)"/>
           <p:cNvPicPr>
             <a:picLocks noChangeAspect="1"/>
           </p:cNvPicPr>
@@ -2927,15 +2927,15 @@
         </p:nvPicPr>
         <p:blipFill>
           <a:blip r:embed="rId1"/>
-          <a:srcRect l="9314" t="4319" r="15117" b="6438"/>
+          <a:srcRect l="9067" t="5541" r="14906" b="13587"/>
           <a:stretch>
             <a:fillRect/>
           </a:stretch>
         </p:blipFill>
         <p:spPr>
           <a:xfrm>
-            <a:off x="116205" y="2091690"/>
-            <a:ext cx="3420000" cy="1748319"/>
+            <a:off x="123308" y="1224589"/>
+            <a:ext cx="3420704" cy="2664339"/>
           </a:xfrm>
           <a:prstGeom prst="rect">
             <a:avLst/>
@@ -2944,7 +2944,7 @@
       </p:pic>
       <p:pic>
         <p:nvPicPr>
-          <p:cNvPr id="5" name="图片 4" descr="Figure 5(a)"/>
+          <p:cNvPr id="6" name="图片 5" descr="Figure 6(a)"/>
           <p:cNvPicPr>
             <a:picLocks noChangeAspect="1"/>
           </p:cNvPicPr>
@@ -2952,15 +2952,15 @@
         </p:nvPicPr>
         <p:blipFill>
           <a:blip r:embed="rId2"/>
-          <a:srcRect l="9173" t="4290" r="15100" b="6394"/>
+          <a:srcRect l="9190" t="249" r="15400" b="914"/>
           <a:stretch>
             <a:fillRect/>
           </a:stretch>
         </p:blipFill>
         <p:spPr>
           <a:xfrm>
-            <a:off x="109855" y="279400"/>
-            <a:ext cx="3420000" cy="1758197"/>
+            <a:off x="127945" y="184578"/>
+            <a:ext cx="3420880" cy="951445"/>
           </a:xfrm>
           <a:prstGeom prst="rect">
             <a:avLst/>
@@ -2975,8 +2975,8 @@
         </p:nvSpPr>
         <p:spPr>
           <a:xfrm>
-            <a:off x="128270" y="18415"/>
-            <a:ext cx="2744470" cy="260350"/>
+            <a:off x="16511" y="3895739"/>
+            <a:ext cx="3506015" cy="1545034"/>
           </a:xfrm>
           <a:prstGeom prst="rect">
             <a:avLst/>
@@ -2985,19 +2985,27 @@
         </p:spPr>
         <p:txBody>
           <a:bodyPr wrap="square" rtlCol="0">
-            <a:spAutoFit/>
+            <a:noAutofit/>
           </a:bodyPr>
           <a:p>
             <a:pPr algn="l"/>
             <a:r>
-              <a:rPr lang="en-US" altLang="zh-CN" sz="1100">
+              <a:rPr lang="en-US" altLang="zh-CN" sz="700" b="1">
                 <a:latin typeface="Times New Roman" panose="02020603050405020304" charset="0"/>
                 <a:cs typeface="Times New Roman" panose="02020603050405020304" charset="0"/>
                 <a:sym typeface="+mn-ea"/>
               </a:rPr>
-              <a:t>Taukim Xu, et.al. Figure 5. </a:t>
-            </a:r>
-            <a:endParaRPr lang="en-US" altLang="zh-CN" sz="1100">
+              <a:t>Fig. 5. Distribution curves for weight and height residuals.</a:t>
+            </a:r>
+            <a:r>
+              <a:rPr lang="en-US" altLang="zh-CN" sz="700">
+                <a:latin typeface="Times New Roman" panose="02020603050405020304" charset="0"/>
+                <a:cs typeface="Times New Roman" panose="02020603050405020304" charset="0"/>
+                <a:sym typeface="+mn-ea"/>
+              </a:rPr>
+              <a:t> (A) Comparison of height residual distributions across continents. (B) Comparison of weight residual distributions across continents and age groups. To elucidate age-dependent patterns, the weight residuals were aggregated by continent (top panels: Europe; middle panels: Americas; bottom panels: Asia) and further categorized into three age groups (Age &lt; 25 years, 25 ≤ Age &lt; 50 years, and Age ≥ 50 years). To address the issue of predicted weight approaching infinity as height nears the theoretical upper limit (1/b), an exclusion criterion was applied to omit data points with weight residuals falling outside the biologically plausible range of -100 Kg to 100 Kg. For all distribution curves, the 5th and 95th percentile positions are marked to illustrate symmetry characteristics. The weight and height residuals (Hr-Hp, Wr-Wp) are defined as the differences between the observed values and the constraint-model-predicted values.</a:t>
+            </a:r>
+            <a:endParaRPr lang="en-US" altLang="zh-CN" sz="700">
               <a:latin typeface="Times New Roman" panose="02020603050405020304" charset="0"/>
               <a:cs typeface="Times New Roman" panose="02020603050405020304" charset="0"/>
               <a:sym typeface="+mn-ea"/>
@@ -3007,7 +3015,7 @@
       </p:sp>
       <p:sp>
         <p:nvSpPr>
-          <p:cNvPr id="6" name="文本框 5"/>
+          <p:cNvPr id="26" name="文本框 25"/>
           <p:cNvSpPr txBox="1"/>
           <p:nvPr>
             <p:custDataLst>
@@ -3017,8 +3025,8 @@
         </p:nvSpPr>
         <p:spPr>
           <a:xfrm>
-            <a:off x="42232" y="178499"/>
-            <a:ext cx="136940" cy="357176"/>
+            <a:off x="34713" y="81420"/>
+            <a:ext cx="136968" cy="357249"/>
           </a:xfrm>
           <a:prstGeom prst="rect">
             <a:avLst/>
@@ -3036,7 +3044,7 @@
                 <a:latin typeface="Times New Roman" panose="02020603050405020304" charset="0"/>
                 <a:cs typeface="Times New Roman" panose="02020603050405020304" charset="0"/>
               </a:rPr>
-              <a:t>a</a:t>
+              <a:t>A</a:t>
             </a:r>
             <a:endParaRPr lang="en-US" altLang="zh-CN" sz="1000" b="1">
               <a:latin typeface="Times New Roman" panose="02020603050405020304" charset="0"/>
@@ -3047,7 +3055,7 @@
       </p:sp>
       <p:sp>
         <p:nvSpPr>
-          <p:cNvPr id="7" name="文本框 6"/>
+          <p:cNvPr id="4" name="文本框 3"/>
           <p:cNvSpPr txBox="1"/>
           <p:nvPr>
             <p:custDataLst>
@@ -3057,8 +3065,8 @@
         </p:nvSpPr>
         <p:spPr>
           <a:xfrm>
-            <a:off x="55567" y="1987614"/>
-            <a:ext cx="136940" cy="357176"/>
+            <a:off x="34713" y="1116352"/>
+            <a:ext cx="136968" cy="357249"/>
           </a:xfrm>
           <a:prstGeom prst="rect">
             <a:avLst/>
@@ -3076,7 +3084,7 @@
                 <a:latin typeface="Times New Roman" panose="02020603050405020304" charset="0"/>
                 <a:cs typeface="Times New Roman" panose="02020603050405020304" charset="0"/>
               </a:rPr>
-              <a:t>b</a:t>
+              <a:t>B</a:t>
             </a:r>
             <a:endParaRPr lang="en-US" altLang="zh-CN" sz="1000" b="1">
               <a:latin typeface="Times New Roman" panose="02020603050405020304" charset="0"/>
